--- a/FINAL.pptx
+++ b/FINAL.pptx
@@ -5,15 +5,15 @@
     <p:sldMasterId id="2147483648" r:id="rId1"/>
   </p:sldMasterIdLst>
   <p:sldIdLst>
-    <p:sldId id="256" r:id="rId3"/>
-    <p:sldId id="259" r:id="rId4"/>
-    <p:sldId id="257" r:id="rId5"/>
-    <p:sldId id="263" r:id="rId6"/>
-    <p:sldId id="260" r:id="rId7"/>
-    <p:sldId id="264" r:id="rId8"/>
+    <p:sldId id="256" r:id="rId2"/>
+    <p:sldId id="259" r:id="rId3"/>
+    <p:sldId id="257" r:id="rId4"/>
+    <p:sldId id="263" r:id="rId5"/>
+    <p:sldId id="260" r:id="rId6"/>
+    <p:sldId id="264" r:id="rId7"/>
   </p:sldIdLst>
   <p:sldSz cx="12192000" cy="6858000"/>
-  <p:notesSz cx="7103745" cy="10234295"/>
+  <p:notesSz cx="7104063" cy="10234613"/>
   <p:defaultTextStyle>
     <a:defPPr>
       <a:defRPr lang="en-US"/>
@@ -109,6 +109,14 @@
       </a:defRPr>
     </a:lvl9pPr>
   </p:defaultTextStyle>
+  <p:extLst>
+    <p:ext uri="{EFAFB233-063F-42B5-8137-9DF3F51BA10A}">
+      <p15:sldGuideLst xmlns:p15="http://schemas.microsoft.com/office/powerpoint/2012/main"/>
+    </p:ext>
+    <p:ext uri="{2D200454-40CA-4A62-9FC3-DE9A4176ACB9}">
+      <p15:notesGuideLst xmlns:p15="http://schemas.microsoft.com/office/powerpoint/2012/main"/>
+    </p:ext>
+  </p:extLst>
 </p:presentation>
 </file>
 
@@ -243,6 +251,7 @@
           <a:p>
             <a:fld id="{FDE934FF-F4E1-47C5-9CA5-30A81DDE2BE4}" type="datetimeFigureOut">
               <a:rPr lang="en-US" smtClean="0"/>
+              <a:t>9/7/2026</a:t>
             </a:fld>
             <a:endParaRPr lang="en-US"/>
           </a:p>
@@ -284,6 +293,7 @@
           <a:p>
             <a:fld id="{B3561BA9-CDCF-4958-B8AB-66F3BF063E13}" type="slidenum">
               <a:rPr lang="en-US" smtClean="0"/>
+              <a:t>‹#›</a:t>
             </a:fld>
             <a:endParaRPr lang="en-US"/>
           </a:p>
@@ -339,7 +349,6 @@
               <a:rPr lang="en-US" smtClean="0"/>
               <a:t>Click to edit Master text styles</a:t>
             </a:r>
-            <a:endParaRPr lang="en-US" smtClean="0"/>
           </a:p>
           <a:p>
             <a:pPr lvl="1"/>
@@ -347,7 +356,6 @@
               <a:rPr lang="en-US" smtClean="0"/>
               <a:t>Second level</a:t>
             </a:r>
-            <a:endParaRPr lang="en-US" smtClean="0"/>
           </a:p>
           <a:p>
             <a:pPr lvl="2"/>
@@ -355,7 +363,6 @@
               <a:rPr lang="en-US" smtClean="0"/>
               <a:t>Third level</a:t>
             </a:r>
-            <a:endParaRPr lang="en-US" smtClean="0"/>
           </a:p>
           <a:p>
             <a:pPr lvl="3"/>
@@ -363,7 +370,6 @@
               <a:rPr lang="en-US" smtClean="0"/>
               <a:t>Fourth level</a:t>
             </a:r>
-            <a:endParaRPr lang="en-US" smtClean="0"/>
           </a:p>
           <a:p>
             <a:pPr lvl="4"/>
@@ -392,6 +398,7 @@
           <a:p>
             <a:fld id="{FDE934FF-F4E1-47C5-9CA5-30A81DDE2BE4}" type="datetimeFigureOut">
               <a:rPr lang="en-US" smtClean="0"/>
+              <a:t>9/7/2026</a:t>
             </a:fld>
             <a:endParaRPr lang="en-US"/>
           </a:p>
@@ -433,6 +440,7 @@
           <a:p>
             <a:fld id="{B3561BA9-CDCF-4958-B8AB-66F3BF063E13}" type="slidenum">
               <a:rPr lang="en-US" smtClean="0"/>
+              <a:t>‹#›</a:t>
             </a:fld>
             <a:endParaRPr lang="en-US"/>
           </a:p>
@@ -506,7 +514,6 @@
               <a:rPr lang="en-US" smtClean="0"/>
               <a:t>Click to edit Master text styles</a:t>
             </a:r>
-            <a:endParaRPr lang="en-US" smtClean="0"/>
           </a:p>
           <a:p>
             <a:pPr lvl="1"/>
@@ -514,7 +521,6 @@
               <a:rPr lang="en-US" smtClean="0"/>
               <a:t>Second level</a:t>
             </a:r>
-            <a:endParaRPr lang="en-US" smtClean="0"/>
           </a:p>
           <a:p>
             <a:pPr lvl="2"/>
@@ -522,7 +528,6 @@
               <a:rPr lang="en-US" smtClean="0"/>
               <a:t>Third level</a:t>
             </a:r>
-            <a:endParaRPr lang="en-US" smtClean="0"/>
           </a:p>
           <a:p>
             <a:pPr lvl="3"/>
@@ -530,7 +535,6 @@
               <a:rPr lang="en-US" smtClean="0"/>
               <a:t>Fourth level</a:t>
             </a:r>
-            <a:endParaRPr lang="en-US" smtClean="0"/>
           </a:p>
           <a:p>
             <a:pPr lvl="4"/>
@@ -559,6 +563,7 @@
           <a:p>
             <a:fld id="{FDE934FF-F4E1-47C5-9CA5-30A81DDE2BE4}" type="datetimeFigureOut">
               <a:rPr lang="en-US" smtClean="0"/>
+              <a:t>9/7/2026</a:t>
             </a:fld>
             <a:endParaRPr lang="en-US"/>
           </a:p>
@@ -600,6 +605,7 @@
           <a:p>
             <a:fld id="{B3561BA9-CDCF-4958-B8AB-66F3BF063E13}" type="slidenum">
               <a:rPr lang="en-US" smtClean="0"/>
+              <a:t>‹#›</a:t>
             </a:fld>
             <a:endParaRPr lang="en-US"/>
           </a:p>
@@ -778,7 +784,6 @@
               <a:rPr lang="en-US" smtClean="0"/>
               <a:t>Click to edit Master text styles</a:t>
             </a:r>
-            <a:endParaRPr lang="en-US" smtClean="0"/>
           </a:p>
         </p:txBody>
       </p:sp>
@@ -799,6 +804,7 @@
           <a:p>
             <a:fld id="{FDE934FF-F4E1-47C5-9CA5-30A81DDE2BE4}" type="datetimeFigureOut">
               <a:rPr lang="en-US" smtClean="0"/>
+              <a:t>9/7/2026</a:t>
             </a:fld>
             <a:endParaRPr lang="en-US"/>
           </a:p>
@@ -840,6 +846,7 @@
           <a:p>
             <a:fld id="{B3561BA9-CDCF-4958-B8AB-66F3BF063E13}" type="slidenum">
               <a:rPr lang="en-US" smtClean="0"/>
+              <a:t>‹#›</a:t>
             </a:fld>
             <a:endParaRPr lang="en-US"/>
           </a:p>
@@ -918,7 +925,6 @@
               <a:rPr lang="en-US" smtClean="0"/>
               <a:t>Click to edit Master text styles</a:t>
             </a:r>
-            <a:endParaRPr lang="en-US" smtClean="0"/>
           </a:p>
           <a:p>
             <a:pPr lvl="1"/>
@@ -926,7 +932,6 @@
               <a:rPr lang="en-US" smtClean="0"/>
               <a:t>Second level</a:t>
             </a:r>
-            <a:endParaRPr lang="en-US" smtClean="0"/>
           </a:p>
           <a:p>
             <a:pPr lvl="2"/>
@@ -934,7 +939,6 @@
               <a:rPr lang="en-US" smtClean="0"/>
               <a:t>Third level</a:t>
             </a:r>
-            <a:endParaRPr lang="en-US" smtClean="0"/>
           </a:p>
           <a:p>
             <a:pPr lvl="3"/>
@@ -942,7 +946,6 @@
               <a:rPr lang="en-US" smtClean="0"/>
               <a:t>Fourth level</a:t>
             </a:r>
-            <a:endParaRPr lang="en-US" smtClean="0"/>
           </a:p>
           <a:p>
             <a:pPr lvl="4"/>
@@ -979,7 +982,6 @@
               <a:rPr lang="en-US" smtClean="0"/>
               <a:t>Click to edit Master text styles</a:t>
             </a:r>
-            <a:endParaRPr lang="en-US" smtClean="0"/>
           </a:p>
           <a:p>
             <a:pPr lvl="1"/>
@@ -987,7 +989,6 @@
               <a:rPr lang="en-US" smtClean="0"/>
               <a:t>Second level</a:t>
             </a:r>
-            <a:endParaRPr lang="en-US" smtClean="0"/>
           </a:p>
           <a:p>
             <a:pPr lvl="2"/>
@@ -995,7 +996,6 @@
               <a:rPr lang="en-US" smtClean="0"/>
               <a:t>Third level</a:t>
             </a:r>
-            <a:endParaRPr lang="en-US" smtClean="0"/>
           </a:p>
           <a:p>
             <a:pPr lvl="3"/>
@@ -1003,7 +1003,6 @@
               <a:rPr lang="en-US" smtClean="0"/>
               <a:t>Fourth level</a:t>
             </a:r>
-            <a:endParaRPr lang="en-US" smtClean="0"/>
           </a:p>
           <a:p>
             <a:pPr lvl="4"/>
@@ -1032,6 +1031,7 @@
           <a:p>
             <a:fld id="{FDE934FF-F4E1-47C5-9CA5-30A81DDE2BE4}" type="datetimeFigureOut">
               <a:rPr lang="en-US" smtClean="0"/>
+              <a:t>9/7/2026</a:t>
             </a:fld>
             <a:endParaRPr lang="en-US"/>
           </a:p>
@@ -1073,6 +1073,7 @@
           <a:p>
             <a:fld id="{B3561BA9-CDCF-4958-B8AB-66F3BF063E13}" type="slidenum">
               <a:rPr lang="en-US" smtClean="0"/>
+              <a:t>‹#›</a:t>
             </a:fld>
             <a:endParaRPr lang="en-US"/>
           </a:p>
@@ -1193,7 +1194,6 @@
               <a:rPr lang="en-US" smtClean="0"/>
               <a:t>Click to edit Master text styles</a:t>
             </a:r>
-            <a:endParaRPr lang="en-US" smtClean="0"/>
           </a:p>
         </p:txBody>
       </p:sp>
@@ -1222,7 +1222,6 @@
               <a:rPr lang="en-US" smtClean="0"/>
               <a:t>Click to edit Master text styles</a:t>
             </a:r>
-            <a:endParaRPr lang="en-US" smtClean="0"/>
           </a:p>
           <a:p>
             <a:pPr lvl="1"/>
@@ -1230,7 +1229,6 @@
               <a:rPr lang="en-US" smtClean="0"/>
               <a:t>Second level</a:t>
             </a:r>
-            <a:endParaRPr lang="en-US" smtClean="0"/>
           </a:p>
           <a:p>
             <a:pPr lvl="2"/>
@@ -1238,7 +1236,6 @@
               <a:rPr lang="en-US" smtClean="0"/>
               <a:t>Third level</a:t>
             </a:r>
-            <a:endParaRPr lang="en-US" smtClean="0"/>
           </a:p>
           <a:p>
             <a:pPr lvl="3"/>
@@ -1246,7 +1243,6 @@
               <a:rPr lang="en-US" smtClean="0"/>
               <a:t>Fourth level</a:t>
             </a:r>
-            <a:endParaRPr lang="en-US" smtClean="0"/>
           </a:p>
           <a:p>
             <a:pPr lvl="4"/>
@@ -1320,7 +1316,6 @@
               <a:rPr lang="en-US" smtClean="0"/>
               <a:t>Click to edit Master text styles</a:t>
             </a:r>
-            <a:endParaRPr lang="en-US" smtClean="0"/>
           </a:p>
         </p:txBody>
       </p:sp>
@@ -1349,7 +1344,6 @@
               <a:rPr lang="en-US" smtClean="0"/>
               <a:t>Click to edit Master text styles</a:t>
             </a:r>
-            <a:endParaRPr lang="en-US" smtClean="0"/>
           </a:p>
           <a:p>
             <a:pPr lvl="1"/>
@@ -1357,7 +1351,6 @@
               <a:rPr lang="en-US" smtClean="0"/>
               <a:t>Second level</a:t>
             </a:r>
-            <a:endParaRPr lang="en-US" smtClean="0"/>
           </a:p>
           <a:p>
             <a:pPr lvl="2"/>
@@ -1365,7 +1358,6 @@
               <a:rPr lang="en-US" smtClean="0"/>
               <a:t>Third level</a:t>
             </a:r>
-            <a:endParaRPr lang="en-US" smtClean="0"/>
           </a:p>
           <a:p>
             <a:pPr lvl="3"/>
@@ -1373,7 +1365,6 @@
               <a:rPr lang="en-US" smtClean="0"/>
               <a:t>Fourth level</a:t>
             </a:r>
-            <a:endParaRPr lang="en-US" smtClean="0"/>
           </a:p>
           <a:p>
             <a:pPr lvl="4"/>
@@ -1402,6 +1393,7 @@
           <a:p>
             <a:fld id="{FDE934FF-F4E1-47C5-9CA5-30A81DDE2BE4}" type="datetimeFigureOut">
               <a:rPr lang="en-US" smtClean="0"/>
+              <a:t>9/7/2026</a:t>
             </a:fld>
             <a:endParaRPr lang="en-US"/>
           </a:p>
@@ -1443,6 +1435,7 @@
           <a:p>
             <a:fld id="{B3561BA9-CDCF-4958-B8AB-66F3BF063E13}" type="slidenum">
               <a:rPr lang="en-US" smtClean="0"/>
+              <a:t>‹#›</a:t>
             </a:fld>
             <a:endParaRPr lang="en-US"/>
           </a:p>
@@ -1513,6 +1506,7 @@
           <a:p>
             <a:fld id="{FDE934FF-F4E1-47C5-9CA5-30A81DDE2BE4}" type="datetimeFigureOut">
               <a:rPr lang="en-US" smtClean="0"/>
+              <a:t>9/7/2026</a:t>
             </a:fld>
             <a:endParaRPr lang="en-US"/>
           </a:p>
@@ -1554,6 +1548,7 @@
           <a:p>
             <a:fld id="{B3561BA9-CDCF-4958-B8AB-66F3BF063E13}" type="slidenum">
               <a:rPr lang="en-US" smtClean="0"/>
+              <a:t>‹#›</a:t>
             </a:fld>
             <a:endParaRPr lang="en-US"/>
           </a:p>
@@ -1601,6 +1596,7 @@
           <a:p>
             <a:fld id="{FDE934FF-F4E1-47C5-9CA5-30A81DDE2BE4}" type="datetimeFigureOut">
               <a:rPr lang="en-US" smtClean="0"/>
+              <a:t>9/7/2026</a:t>
             </a:fld>
             <a:endParaRPr lang="en-US"/>
           </a:p>
@@ -1642,6 +1638,7 @@
           <a:p>
             <a:fld id="{B3561BA9-CDCF-4958-B8AB-66F3BF063E13}" type="slidenum">
               <a:rPr lang="en-US" smtClean="0"/>
+              <a:t>‹#›</a:t>
             </a:fld>
             <a:endParaRPr lang="en-US"/>
           </a:p>
@@ -1827,7 +1824,6 @@
               <a:rPr lang="en-US" smtClean="0"/>
               <a:t>Click to edit Master text styles</a:t>
             </a:r>
-            <a:endParaRPr lang="en-US" smtClean="0"/>
           </a:p>
         </p:txBody>
       </p:sp>
@@ -1848,6 +1844,7 @@
           <a:p>
             <a:fld id="{FDE934FF-F4E1-47C5-9CA5-30A81DDE2BE4}" type="datetimeFigureOut">
               <a:rPr lang="en-US" smtClean="0"/>
+              <a:t>9/7/2026</a:t>
             </a:fld>
             <a:endParaRPr lang="en-US"/>
           </a:p>
@@ -1889,6 +1886,7 @@
           <a:p>
             <a:fld id="{B3561BA9-CDCF-4958-B8AB-66F3BF063E13}" type="slidenum">
               <a:rPr lang="en-US" smtClean="0"/>
+              <a:t>‹#›</a:t>
             </a:fld>
             <a:endParaRPr lang="en-US"/>
           </a:p>
@@ -1979,7 +1977,6 @@
               <a:rPr lang="en-US" smtClean="0"/>
               <a:t>Click to edit Master text styles</a:t>
             </a:r>
-            <a:endParaRPr lang="en-US" smtClean="0"/>
           </a:p>
           <a:p>
             <a:pPr lvl="1"/>
@@ -1987,7 +1984,6 @@
               <a:rPr lang="en-US" smtClean="0"/>
               <a:t>Second level</a:t>
             </a:r>
-            <a:endParaRPr lang="en-US" smtClean="0"/>
           </a:p>
           <a:p>
             <a:pPr lvl="2"/>
@@ -1995,7 +1991,6 @@
               <a:rPr lang="en-US" smtClean="0"/>
               <a:t>Third level</a:t>
             </a:r>
-            <a:endParaRPr lang="en-US" smtClean="0"/>
           </a:p>
           <a:p>
             <a:pPr lvl="3"/>
@@ -2003,7 +1998,6 @@
               <a:rPr lang="en-US" smtClean="0"/>
               <a:t>Fourth level</a:t>
             </a:r>
-            <a:endParaRPr lang="en-US" smtClean="0"/>
           </a:p>
           <a:p>
             <a:pPr lvl="4"/>
@@ -2032,6 +2026,7 @@
           <a:p>
             <a:fld id="{FDE934FF-F4E1-47C5-9CA5-30A81DDE2BE4}" type="datetimeFigureOut">
               <a:rPr lang="en-US" smtClean="0"/>
+              <a:t>9/7/2026</a:t>
             </a:fld>
             <a:endParaRPr lang="en-US"/>
           </a:p>
@@ -2073,6 +2068,7 @@
           <a:p>
             <a:fld id="{B3561BA9-CDCF-4958-B8AB-66F3BF063E13}" type="slidenum">
               <a:rPr lang="en-US" smtClean="0"/>
+              <a:t>‹#›</a:t>
             </a:fld>
             <a:endParaRPr lang="en-US"/>
           </a:p>
@@ -2171,7 +2167,6 @@
               <a:rPr lang="en-US" smtClean="0"/>
               <a:t>Click to edit Master text styles</a:t>
             </a:r>
-            <a:endParaRPr lang="en-US" smtClean="0"/>
           </a:p>
           <a:p>
             <a:pPr lvl="1"/>
@@ -2179,7 +2174,6 @@
               <a:rPr lang="en-US" smtClean="0"/>
               <a:t>Second level</a:t>
             </a:r>
-            <a:endParaRPr lang="en-US" smtClean="0"/>
           </a:p>
           <a:p>
             <a:pPr lvl="2"/>
@@ -2187,7 +2181,6 @@
               <a:rPr lang="en-US" smtClean="0"/>
               <a:t>Third level</a:t>
             </a:r>
-            <a:endParaRPr lang="en-US" smtClean="0"/>
           </a:p>
           <a:p>
             <a:pPr lvl="3"/>
@@ -2195,7 +2188,6 @@
               <a:rPr lang="en-US" smtClean="0"/>
               <a:t>Fourth level</a:t>
             </a:r>
-            <a:endParaRPr lang="en-US" smtClean="0"/>
           </a:p>
           <a:p>
             <a:pPr lvl="4"/>
@@ -2242,6 +2234,7 @@
           <a:p>
             <a:fld id="{FDE934FF-F4E1-47C5-9CA5-30A81DDE2BE4}" type="datetimeFigureOut">
               <a:rPr lang="en-US" smtClean="0"/>
+              <a:t>9/7/2026</a:t>
             </a:fld>
             <a:endParaRPr lang="en-US"/>
           </a:p>
@@ -2319,6 +2312,7 @@
           <a:p>
             <a:fld id="{B3561BA9-CDCF-4958-B8AB-66F3BF063E13}" type="slidenum">
               <a:rPr lang="en-US" smtClean="0"/>
+              <a:t>‹#›</a:t>
             </a:fld>
             <a:endParaRPr lang="en-US"/>
           </a:p>
@@ -2631,7 +2625,14 @@
         <p:cNvGrpSpPr/>
         <p:nvPr/>
       </p:nvGrpSpPr>
-      <p:grpSpPr/>
+      <p:grpSpPr>
+        <a:xfrm>
+          <a:off x="0" y="0"/>
+          <a:ext cx="0" cy="0"/>
+          <a:chOff x="0" y="0"/>
+          <a:chExt cx="0" cy="0"/>
+        </a:xfrm>
+      </p:grpSpPr>
       <p:sp>
         <p:nvSpPr>
           <p:cNvPr id="2" name="Title 1"/>
@@ -2645,6 +2646,7 @@
         <p:spPr/>
         <p:txBody>
           <a:bodyPr/>
+          <a:lstStyle/>
           <a:p>
             <a:endParaRPr lang="en-US"/>
           </a:p>
@@ -2665,6 +2667,7 @@
           <a:bodyPr>
             <a:normAutofit/>
           </a:bodyPr>
+          <a:lstStyle/>
           <a:p>
             <a:pPr algn="l"/>
             <a:endParaRPr lang="en-US" altLang="en-US" sz="1800"/>
@@ -2675,7 +2678,6 @@
               <a:rPr lang="en-US" altLang="en-US" sz="1800"/>
               <a:t>Authors:          Kenan Fırat &amp; Albert Güveniş</a:t>
             </a:r>
-            <a:endParaRPr lang="en-US" altLang="en-US" sz="1800"/>
           </a:p>
           <a:p>
             <a:pPr algn="l"/>
@@ -2683,7 +2685,6 @@
               <a:rPr lang="en-US" altLang="en-US" sz="1800"/>
               <a:t>Domain:          Medical Image Computing &amp; Cancer Radiomics</a:t>
             </a:r>
-            <a:endParaRPr lang="en-US" altLang="en-US" sz="1800"/>
           </a:p>
           <a:p>
             <a:pPr algn="l"/>
@@ -2691,7 +2692,6 @@
               <a:rPr lang="en-US" altLang="en-US" sz="1800"/>
               <a:t>IEEE Citation:  10.1109/USBEREIT 2026</a:t>
             </a:r>
-            <a:endParaRPr lang="en-US" altLang="en-US" sz="1800"/>
           </a:p>
         </p:txBody>
       </p:sp>
@@ -2712,34 +2712,17 @@
         <p:cNvGrpSpPr/>
         <p:nvPr/>
       </p:nvGrpSpPr>
-      <p:grpSpPr/>
+      <p:grpSpPr>
+        <a:xfrm>
+          <a:off x="0" y="0"/>
+          <a:ext cx="0" cy="0"/>
+          <a:chOff x="0" y="0"/>
+          <a:chExt cx="0" cy="0"/>
+        </a:xfrm>
+      </p:grpSpPr>
       <p:pic>
         <p:nvPicPr>
           <p:cNvPr id="2" name="Picture 1" descr="image.png"/>
-          <p:cNvPicPr>
-            <a:picLocks noChangeAspect="1"/>
-          </p:cNvPicPr>
-          <p:nvPr/>
-        </p:nvPicPr>
-        <p:blipFill>
-          <a:blip r:embed="rId1"/>
-          <a:stretch>
-            <a:fillRect/>
-          </a:stretch>
-        </p:blipFill>
-        <p:spPr>
-          <a:xfrm>
-            <a:off x="0" y="0"/>
-            <a:ext cx="12192000" cy="6858000"/>
-          </a:xfrm>
-          <a:prstGeom prst="rect">
-            <a:avLst/>
-          </a:prstGeom>
-        </p:spPr>
-      </p:pic>
-      <p:pic>
-        <p:nvPicPr>
-          <p:cNvPr id="3" name="Picture 2" descr="image.png"/>
           <p:cNvPicPr>
             <a:picLocks noChangeAspect="1"/>
           </p:cNvPicPr>
@@ -2753,8 +2736,8 @@
         </p:blipFill>
         <p:spPr>
           <a:xfrm>
-            <a:off x="581025" y="3814762"/>
-            <a:ext cx="11029950" cy="38100"/>
+            <a:off x="0" y="0"/>
+            <a:ext cx="12192000" cy="6858000"/>
           </a:xfrm>
           <a:prstGeom prst="rect">
             <a:avLst/>
@@ -2763,7 +2746,7 @@
       </p:pic>
       <p:pic>
         <p:nvPicPr>
-          <p:cNvPr id="4" name="Picture 3" descr="image.png"/>
+          <p:cNvPr id="3" name="Picture 2" descr="image.png"/>
           <p:cNvPicPr>
             <a:picLocks noChangeAspect="1"/>
           </p:cNvPicPr>
@@ -2777,8 +2760,8 @@
         </p:blipFill>
         <p:spPr>
           <a:xfrm>
-            <a:off x="503336" y="4100512"/>
-            <a:ext cx="1809750" cy="1677590"/>
+            <a:off x="581025" y="3814762"/>
+            <a:ext cx="11029950" cy="38100"/>
           </a:xfrm>
           <a:prstGeom prst="rect">
             <a:avLst/>
@@ -2787,7 +2770,7 @@
       </p:pic>
       <p:pic>
         <p:nvPicPr>
-          <p:cNvPr id="5" name="Picture 4" descr="image.png"/>
+          <p:cNvPr id="4" name="Picture 3" descr="image.png"/>
           <p:cNvPicPr>
             <a:picLocks noChangeAspect="1"/>
           </p:cNvPicPr>
@@ -2801,7 +2784,7 @@
         </p:blipFill>
         <p:spPr>
           <a:xfrm>
-            <a:off x="2378422" y="1889521"/>
+            <a:off x="503336" y="4100512"/>
             <a:ext cx="1809750" cy="1677590"/>
           </a:xfrm>
           <a:prstGeom prst="rect">
@@ -2811,7 +2794,7 @@
       </p:pic>
       <p:pic>
         <p:nvPicPr>
-          <p:cNvPr id="6" name="Picture 5" descr="image.png"/>
+          <p:cNvPr id="5" name="Picture 4" descr="image.png"/>
           <p:cNvPicPr>
             <a:picLocks noChangeAspect="1"/>
           </p:cNvPicPr>
@@ -2825,8 +2808,8 @@
         </p:blipFill>
         <p:spPr>
           <a:xfrm>
-            <a:off x="4253507" y="4100512"/>
-            <a:ext cx="1809750" cy="1504354"/>
+            <a:off x="2378422" y="1889521"/>
+            <a:ext cx="1809750" cy="1677590"/>
           </a:xfrm>
           <a:prstGeom prst="rect">
             <a:avLst/>
@@ -2835,7 +2818,7 @@
       </p:pic>
       <p:pic>
         <p:nvPicPr>
-          <p:cNvPr id="7" name="Picture 6" descr="image.png"/>
+          <p:cNvPr id="6" name="Picture 5" descr="image.png"/>
           <p:cNvPicPr>
             <a:picLocks noChangeAspect="1"/>
           </p:cNvPicPr>
@@ -2849,7 +2832,7 @@
         </p:blipFill>
         <p:spPr>
           <a:xfrm>
-            <a:off x="6128593" y="2062757"/>
+            <a:off x="4253507" y="4100512"/>
             <a:ext cx="1809750" cy="1504354"/>
           </a:xfrm>
           <a:prstGeom prst="rect">
@@ -2859,7 +2842,7 @@
       </p:pic>
       <p:pic>
         <p:nvPicPr>
-          <p:cNvPr id="8" name="Picture 7" descr="image.png"/>
+          <p:cNvPr id="7" name="Picture 6" descr="image.png"/>
           <p:cNvPicPr>
             <a:picLocks noChangeAspect="1"/>
           </p:cNvPicPr>
@@ -2873,7 +2856,7 @@
         </p:blipFill>
         <p:spPr>
           <a:xfrm>
-            <a:off x="8003678" y="4100512"/>
+            <a:off x="6128593" y="2062757"/>
             <a:ext cx="1809750" cy="1504354"/>
           </a:xfrm>
           <a:prstGeom prst="rect">
@@ -2883,7 +2866,7 @@
       </p:pic>
       <p:pic>
         <p:nvPicPr>
-          <p:cNvPr id="9" name="Picture 8" descr="image.png"/>
+          <p:cNvPr id="8" name="Picture 7" descr="image.png"/>
           <p:cNvPicPr>
             <a:picLocks noChangeAspect="1"/>
           </p:cNvPicPr>
@@ -2897,6 +2880,30 @@
         </p:blipFill>
         <p:spPr>
           <a:xfrm>
+            <a:off x="8003678" y="4100512"/>
+            <a:ext cx="1809750" cy="1504354"/>
+          </a:xfrm>
+          <a:prstGeom prst="rect">
+            <a:avLst/>
+          </a:prstGeom>
+        </p:spPr>
+      </p:pic>
+      <p:pic>
+        <p:nvPicPr>
+          <p:cNvPr id="9" name="Picture 8" descr="image.png"/>
+          <p:cNvPicPr>
+            <a:picLocks noChangeAspect="1"/>
+          </p:cNvPicPr>
+          <p:nvPr/>
+        </p:nvPicPr>
+        <p:blipFill>
+          <a:blip r:embed="rId9"/>
+          <a:stretch>
+            <a:fillRect/>
+          </a:stretch>
+        </p:blipFill>
+        <p:spPr>
+          <a:xfrm>
             <a:off x="9878764" y="1889521"/>
             <a:ext cx="1809750" cy="1677590"/>
           </a:xfrm>
@@ -2937,12 +2944,6 @@
               </a:rPr>
               <a:t>1895</a:t>
             </a:r>
-            <a:endParaRPr sz="1350" b="1" i="0" u="none">
-              <a:solidFill>
-                <a:srgbClr val="38BDF8"/>
-              </a:solidFill>
-              <a:latin typeface="Poppins"/>
-            </a:endParaRPr>
           </a:p>
         </p:txBody>
       </p:sp>
@@ -2995,12 +2996,6 @@
               </a:rPr>
               <a:t> Wilhelm Röntgen discovers X-rays, enabling non-invasive qualitative anatomical visualization.</a:t>
             </a:r>
-            <a:endParaRPr sz="975" b="0" i="0" u="none">
-              <a:solidFill>
-                <a:srgbClr val="94A3B8"/>
-              </a:solidFill>
-              <a:latin typeface="Inter"/>
-            </a:endParaRPr>
           </a:p>
         </p:txBody>
       </p:sp>
@@ -3036,12 +3031,6 @@
               </a:rPr>
               <a:t>1971</a:t>
             </a:r>
-            <a:endParaRPr sz="1350" b="1" i="0" u="none">
-              <a:solidFill>
-                <a:srgbClr val="38BDF8"/>
-              </a:solidFill>
-              <a:latin typeface="Poppins"/>
-            </a:endParaRPr>
           </a:p>
         </p:txBody>
       </p:sp>
@@ -3094,12 +3083,6 @@
               </a:rPr>
               <a:t> Godfrey Hounsfield invents Computed Tomography, introducing 3D density pixel matrices (HU).</a:t>
             </a:r>
-            <a:endParaRPr sz="975" b="0" i="0" u="none">
-              <a:solidFill>
-                <a:srgbClr val="94A3B8"/>
-              </a:solidFill>
-              <a:latin typeface="Inter"/>
-            </a:endParaRPr>
           </a:p>
         </p:txBody>
       </p:sp>
@@ -3135,12 +3118,6 @@
               </a:rPr>
               <a:t>1973</a:t>
             </a:r>
-            <a:endParaRPr sz="1350" b="1" i="0" u="none">
-              <a:solidFill>
-                <a:srgbClr val="38BDF8"/>
-              </a:solidFill>
-              <a:latin typeface="Poppins"/>
-            </a:endParaRPr>
           </a:p>
         </p:txBody>
       </p:sp>
@@ -3193,12 +3170,6 @@
               </a:rPr>
               <a:t> Haralick proposes GLCM texture features, founding quantitative spatial image analysis.</a:t>
             </a:r>
-            <a:endParaRPr sz="975" b="0" i="0" u="none">
-              <a:solidFill>
-                <a:srgbClr val="94A3B8"/>
-              </a:solidFill>
-              <a:latin typeface="Inter"/>
-            </a:endParaRPr>
           </a:p>
         </p:txBody>
       </p:sp>
@@ -3234,12 +3205,6 @@
               </a:rPr>
               <a:t>2002</a:t>
             </a:r>
-            <a:endParaRPr sz="1350" b="1" i="0" u="none">
-              <a:solidFill>
-                <a:srgbClr val="38BDF8"/>
-              </a:solidFill>
-              <a:latin typeface="Poppins"/>
-            </a:endParaRPr>
           </a:p>
         </p:txBody>
       </p:sp>
@@ -3292,12 +3257,6 @@
               </a:rPr>
               <a:t> Chawla et al. publish SMOTE to address class imbalance in machine learning datasets.</a:t>
             </a:r>
-            <a:endParaRPr sz="975" b="0" i="0" u="none">
-              <a:solidFill>
-                <a:srgbClr val="94A3B8"/>
-              </a:solidFill>
-              <a:latin typeface="Inter"/>
-            </a:endParaRPr>
           </a:p>
         </p:txBody>
       </p:sp>
@@ -3333,12 +3292,6 @@
               </a:rPr>
               <a:t>2012</a:t>
             </a:r>
-            <a:endParaRPr sz="1350" b="1" i="0" u="none">
-              <a:solidFill>
-                <a:srgbClr val="38BDF8"/>
-              </a:solidFill>
-              <a:latin typeface="Poppins"/>
-            </a:endParaRPr>
           </a:p>
         </p:txBody>
       </p:sp>
@@ -3391,12 +3344,6 @@
               </a:rPr>
               <a:t> Lambin et al. coin "Radiomics" for high-throughput extraction of tumor phenotypes.</a:t>
             </a:r>
-            <a:endParaRPr sz="975" b="0" i="0" u="none">
-              <a:solidFill>
-                <a:srgbClr val="94A3B8"/>
-              </a:solidFill>
-              <a:latin typeface="Inter"/>
-            </a:endParaRPr>
           </a:p>
         </p:txBody>
       </p:sp>
@@ -3432,12 +3379,6 @@
               </a:rPr>
               <a:t>2015+</a:t>
             </a:r>
-            <a:endParaRPr sz="1350" b="1" i="0" u="none">
-              <a:solidFill>
-                <a:srgbClr val="38BDF8"/>
-              </a:solidFill>
-              <a:latin typeface="Poppins"/>
-            </a:endParaRPr>
           </a:p>
         </p:txBody>
       </p:sp>
@@ -3490,12 +3431,6 @@
               </a:rPr>
               <a:t> Integration of Deep Learning &amp; ML classifiers into automated quantitative diagnostic pipelines.</a:t>
             </a:r>
-            <a:endParaRPr sz="975" b="0" i="0" u="none">
-              <a:solidFill>
-                <a:srgbClr val="94A3B8"/>
-              </a:solidFill>
-              <a:latin typeface="Inter"/>
-            </a:endParaRPr>
           </a:p>
         </p:txBody>
       </p:sp>
@@ -3531,12 +3466,6 @@
               </a:rPr>
               <a:t>Historical Imaging Timeline</a:t>
             </a:r>
-            <a:endParaRPr sz="2700" b="0" i="0" u="none">
-              <a:solidFill>
-                <a:srgbClr val="F8FAFC"/>
-              </a:solidFill>
-              <a:latin typeface="Poppins SemiBold"/>
-            </a:endParaRPr>
           </a:p>
         </p:txBody>
       </p:sp>
@@ -3585,6 +3514,7 @@
           <a:lstStyle/>
           <a:p>
             <a:pPr algn="ctr"/>
+            <a:endParaRPr/>
           </a:p>
         </p:txBody>
       </p:sp>
@@ -3633,6 +3563,7 @@
           <a:lstStyle/>
           <a:p>
             <a:pPr algn="ctr"/>
+            <a:endParaRPr/>
           </a:p>
         </p:txBody>
       </p:sp>
@@ -3681,6 +3612,7 @@
           <a:lstStyle/>
           <a:p>
             <a:pPr algn="ctr"/>
+            <a:endParaRPr/>
           </a:p>
         </p:txBody>
       </p:sp>
@@ -3729,6 +3661,7 @@
           <a:lstStyle/>
           <a:p>
             <a:pPr algn="ctr"/>
+            <a:endParaRPr/>
           </a:p>
         </p:txBody>
       </p:sp>
@@ -3777,6 +3710,7 @@
           <a:lstStyle/>
           <a:p>
             <a:pPr algn="ctr"/>
+            <a:endParaRPr/>
           </a:p>
         </p:txBody>
       </p:sp>
@@ -3825,6 +3759,7 @@
           <a:lstStyle/>
           <a:p>
             <a:pPr algn="ctr"/>
+            <a:endParaRPr/>
           </a:p>
         </p:txBody>
       </p:sp>
@@ -3845,7 +3780,14 @@
         <p:cNvGrpSpPr/>
         <p:nvPr/>
       </p:nvGrpSpPr>
-      <p:grpSpPr/>
+      <p:grpSpPr>
+        <a:xfrm>
+          <a:off x="0" y="0"/>
+          <a:ext cx="0" cy="0"/>
+          <a:chOff x="0" y="0"/>
+          <a:chExt cx="0" cy="0"/>
+        </a:xfrm>
+      </p:grpSpPr>
       <p:sp>
         <p:nvSpPr>
           <p:cNvPr id="2" name="Title 1"/>
@@ -3859,12 +3801,12 @@
         <p:spPr/>
         <p:txBody>
           <a:bodyPr/>
+          <a:lstStyle/>
           <a:p>
             <a:r>
               <a:rPr lang="" altLang="en-US"/>
               <a:t>X Ray</a:t>
             </a:r>
-            <a:endParaRPr lang="" altLang="en-US"/>
           </a:p>
         </p:txBody>
       </p:sp>
@@ -3872,14 +3814,14 @@
         <p:nvPicPr>
           <p:cNvPr id="5" name="Picture Placeholder 4" descr="X ray photo"/>
           <p:cNvPicPr>
-            <a:picLocks noChangeAspect="1"/>
+            <a:picLocks noGrp="1" noChangeAspect="1"/>
           </p:cNvPicPr>
           <p:nvPr>
             <p:ph type="pic" idx="1"/>
           </p:nvPr>
         </p:nvPicPr>
         <p:blipFill>
-          <a:blip r:embed="rId1"/>
+          <a:blip r:embed="rId2"/>
           <a:stretch>
             <a:fillRect/>
           </a:stretch>
@@ -3907,6 +3849,7 @@
         <p:spPr/>
         <p:txBody>
           <a:bodyPr/>
+          <a:lstStyle/>
           <a:p>
             <a:endParaRPr lang="en-US" altLang="en-US"/>
           </a:p>
@@ -3915,7 +3858,6 @@
               <a:rPr lang="" altLang="en-US"/>
               <a:t>X-ray is defined as a form of high energy electromagnetic wave </a:t>
             </a:r>
-            <a:endParaRPr lang="" altLang="en-US"/>
           </a:p>
           <a:p>
             <a:pPr marL="285750" indent="-285750">
@@ -3941,7 +3883,6 @@
               <a:rPr lang="" altLang="en-US"/>
               <a:t>able to penetrate the body </a:t>
             </a:r>
-            <a:endParaRPr lang="" altLang="en-US"/>
           </a:p>
           <a:p>
             <a:pPr>
@@ -3966,7 +3907,6 @@
               <a:rPr lang="" altLang="en-US"/>
               <a:t>absorbed by different tissues to produce shadow-like images on a detector.</a:t>
             </a:r>
-            <a:endParaRPr lang="" altLang="en-US"/>
           </a:p>
         </p:txBody>
       </p:sp>
@@ -3987,7 +3927,14 @@
         <p:cNvGrpSpPr/>
         <p:nvPr/>
       </p:nvGrpSpPr>
-      <p:grpSpPr/>
+      <p:grpSpPr>
+        <a:xfrm>
+          <a:off x="0" y="0"/>
+          <a:ext cx="0" cy="0"/>
+          <a:chOff x="0" y="0"/>
+          <a:chExt cx="0" cy="0"/>
+        </a:xfrm>
+      </p:grpSpPr>
       <p:sp>
         <p:nvSpPr>
           <p:cNvPr id="4" name="Title 3"/>
@@ -4001,6 +3948,7 @@
         <p:spPr/>
         <p:txBody>
           <a:bodyPr/>
+          <a:lstStyle/>
           <a:p>
             <a:endParaRPr lang="en-US"/>
           </a:p>
@@ -4010,14 +3958,14 @@
         <p:nvPicPr>
           <p:cNvPr id="6" name="Picture Placeholder 5" descr="Xray_CT technique_fig12_CTscanner_600x0"/>
           <p:cNvPicPr>
-            <a:picLocks noChangeAspect="1"/>
+            <a:picLocks noGrp="1" noChangeAspect="1"/>
           </p:cNvPicPr>
           <p:nvPr>
             <p:ph type="pic" idx="1"/>
           </p:nvPr>
         </p:nvPicPr>
         <p:blipFill>
-          <a:blip r:embed="rId1"/>
+          <a:blip r:embed="rId2"/>
           <a:stretch>
             <a:fillRect/>
           </a:stretch>
@@ -4045,12 +3993,12 @@
         <p:spPr/>
         <p:txBody>
           <a:bodyPr/>
+          <a:lstStyle/>
           <a:p>
             <a:r>
               <a:rPr lang="en-US" altLang="en-US"/>
               <a:t>CT Scan : Work on X-Ray photons which allow taking photos of organs and living biostructures</a:t>
             </a:r>
-            <a:endParaRPr lang="en-US" altLang="en-US"/>
           </a:p>
           <a:p>
             <a:r>
@@ -4081,7 +4029,6 @@
               <a:rPr lang="en-US" altLang="en-US"/>
               <a:t>. </a:t>
             </a:r>
-            <a:endParaRPr lang="en-US" altLang="en-US"/>
           </a:p>
           <a:p>
             <a:r>
@@ -4106,7 +4053,6 @@
               <a:rPr lang="en-US" altLang="en-US"/>
               <a:t>Data mining : Radiomics inspects CT scan pixel values and construct biologically correlated information</a:t>
             </a:r>
-            <a:endParaRPr lang="en-US" altLang="en-US"/>
           </a:p>
         </p:txBody>
       </p:sp>
@@ -4127,7 +4073,14 @@
         <p:cNvGrpSpPr/>
         <p:nvPr/>
       </p:nvGrpSpPr>
-      <p:grpSpPr/>
+      <p:grpSpPr>
+        <a:xfrm>
+          <a:off x="0" y="0"/>
+          <a:ext cx="0" cy="0"/>
+          <a:chOff x="0" y="0"/>
+          <a:chExt cx="0" cy="0"/>
+        </a:xfrm>
+      </p:grpSpPr>
       <p:sp>
         <p:nvSpPr>
           <p:cNvPr id="2" name="Title 1"/>
@@ -4141,12 +4094,12 @@
         <p:spPr/>
         <p:txBody>
           <a:bodyPr/>
+          <a:lstStyle/>
           <a:p>
             <a:r>
               <a:rPr lang="" altLang="en-US"/>
               <a:t>Radiomics</a:t>
             </a:r>
-            <a:endParaRPr lang="" altLang="en-US"/>
           </a:p>
         </p:txBody>
       </p:sp>
@@ -4163,88 +4116,102 @@
         <p:spPr/>
         <p:txBody>
           <a:bodyPr/>
-          <a:p>
-            <a:r>
-              <a:rPr lang=""/>
+          <a:lstStyle/>
+          <a:p>
+            <a:r>
+              <a:rPr lang="" dirty="0"/>
               <a:t>Techniques of extracting </a:t>
             </a:r>
             <a:r>
-              <a:rPr lang="" b="1"/>
+              <a:rPr lang="" b="1" dirty="0"/>
               <a:t>useful quantitative informatio</a:t>
             </a:r>
             <a:r>
-              <a:rPr lang=""/>
+              <a:rPr lang="" dirty="0"/>
               <a:t>n from medical images</a:t>
             </a:r>
             <a:r>
-              <a:rPr lang="en-US"/>
+              <a:rPr lang="en-US" dirty="0"/>
               <a:t>. </a:t>
             </a:r>
             <a:r>
-              <a:rPr lang="" altLang="en-US" sz="1800" i="1"/>
+              <a:rPr lang="" altLang="en-US" sz="1800" i="1" dirty="0"/>
               <a:t>(Shafiq-ul-Hassan et al 2017)</a:t>
             </a:r>
             <a:r>
-              <a:rPr lang="en-US"/>
+              <a:rPr lang="en-US" dirty="0"/>
               <a:t> </a:t>
             </a:r>
-            <a:endParaRPr lang="en-US"/>
-          </a:p>
-          <a:p>
-            <a:r>
-              <a:rPr lang="" altLang="en-US"/>
+          </a:p>
+          <a:p>
+            <a:r>
+              <a:rPr lang="" altLang="en-US" dirty="0"/>
               <a:t>Extraction </a:t>
             </a:r>
             <a:r>
-              <a:rPr lang="" altLang="en-US" b="1"/>
+              <a:rPr lang="" altLang="en-US" b="1" dirty="0"/>
               <a:t>clinically relevant information</a:t>
             </a:r>
             <a:r>
-              <a:rPr lang="" altLang="en-US"/>
+              <a:rPr lang="" altLang="en-US" dirty="0"/>
               <a:t> from radiologic images </a:t>
             </a:r>
             <a:r>
-              <a:rPr lang="" altLang="en-US" sz="1800" i="1"/>
-              <a:t>(MR Tomaszewski, RJ Gillies - Radiology, 2021)</a:t>
-            </a:r>
-            <a:endParaRPr lang="en-US"/>
-          </a:p>
-          <a:p>
-            <a:r>
-              <a:rPr lang="en-US"/>
-              <a:t>Radiomic features capture </a:t>
-            </a:r>
-            <a:r>
-              <a:rPr lang="en-US" b="1" i="1"/>
-              <a:t>tissue and lesion characteristics </a:t>
-            </a:r>
-            <a:r>
-              <a:rPr lang="en-US" i="1"/>
+              <a:rPr lang="" altLang="en-US" dirty="0"/>
+              <a:t> </a:t>
+            </a:r>
+            <a:r>
+              <a:rPr lang="" altLang="en-US" dirty="0" smtClean="0"/>
+              <a:t>    </a:t>
+            </a:r>
+            <a:r>
+              <a:rPr lang="" altLang="en-US" sz="1800" i="1" dirty="0" smtClean="0"/>
+              <a:t>(</a:t>
+            </a:r>
+            <a:r>
+              <a:rPr lang="" altLang="en-US" sz="1800" i="1" dirty="0"/>
+              <a:t>MR Tomaszewski, RJ Gillies - Radiology, 2021)</a:t>
+            </a:r>
+            <a:endParaRPr lang="en-US" dirty="0"/>
+          </a:p>
+          <a:p>
+            <a:r>
+              <a:rPr lang="en-US" dirty="0" smtClean="0"/>
+              <a:t>Capturing </a:t>
+            </a:r>
+            <a:r>
+              <a:rPr lang="en-US" b="1" i="1" dirty="0" smtClean="0"/>
+              <a:t>tissue </a:t>
+            </a:r>
+            <a:r>
+              <a:rPr lang="en-US" b="1" i="1" dirty="0"/>
+              <a:t>and lesion characteristics </a:t>
+            </a:r>
+            <a:r>
+              <a:rPr lang="en-US" i="1" dirty="0"/>
               <a:t>such as heterogeneity and shape and may, alone or in combination with demographic, histologic, genomic, or proteomic data</a:t>
             </a:r>
             <a:r>
-              <a:rPr lang="en-US"/>
+              <a:rPr lang="en-US" dirty="0"/>
               <a:t>, be used for </a:t>
             </a:r>
             <a:r>
-              <a:rPr lang="en-US" b="1"/>
+              <a:rPr lang="en-US" b="1" dirty="0"/>
               <a:t>clinical problem solving</a:t>
             </a:r>
             <a:r>
-              <a:rPr lang="en-US"/>
+              <a:rPr lang="en-US" dirty="0"/>
               <a:t>. </a:t>
             </a:r>
-            <a:endParaRPr lang="en-US"/>
           </a:p>
           <a:p>
             <a:pPr marL="0" indent="0">
               <a:buNone/>
             </a:pPr>
             <a:r>
-              <a:rPr lang="" altLang="en-US" sz="2000" i="1"/>
+              <a:rPr lang="" altLang="en-US" sz="2000" i="1" dirty="0"/>
               <a:t>(Marious E Mayerhoufer et al 2020)</a:t>
             </a:r>
-            <a:endParaRPr lang="" altLang="en-US" sz="2000" i="1"/>
           </a:p>
         </p:txBody>
       </p:sp>
@@ -4265,7 +4232,14 @@
         <p:cNvGrpSpPr/>
         <p:nvPr/>
       </p:nvGrpSpPr>
-      <p:grpSpPr/>
+      <p:grpSpPr>
+        <a:xfrm>
+          <a:off x="0" y="0"/>
+          <a:ext cx="0" cy="0"/>
+          <a:chOff x="0" y="0"/>
+          <a:chExt cx="0" cy="0"/>
+        </a:xfrm>
+      </p:grpSpPr>
       <p:sp>
         <p:nvSpPr>
           <p:cNvPr id="2" name="Title 1"/>
@@ -4279,12 +4253,12 @@
         <p:spPr/>
         <p:txBody>
           <a:bodyPr/>
+          <a:lstStyle/>
           <a:p>
             <a:r>
               <a:rPr lang="" altLang="en-US"/>
               <a:t>Radiomics</a:t>
             </a:r>
-            <a:endParaRPr lang="" altLang="en-US"/>
           </a:p>
         </p:txBody>
       </p:sp>
@@ -4301,26 +4275,24 @@
         <p:spPr/>
         <p:txBody>
           <a:bodyPr/>
+          <a:lstStyle/>
           <a:p>
             <a:r>
               <a:rPr lang="" altLang="en-US"/>
               <a:t>Matematically - Construct comlex matrices</a:t>
             </a:r>
-            <a:endParaRPr lang="" altLang="en-US"/>
           </a:p>
           <a:p>
             <a:r>
               <a:rPr lang="" altLang="en-US"/>
               <a:t>Data Science - Data mining from raw data souce(MEdical Images)</a:t>
             </a:r>
-            <a:endParaRPr lang="" altLang="en-US"/>
           </a:p>
           <a:p>
             <a:r>
               <a:rPr lang="" altLang="en-US"/>
               <a:t>Cilinically - Construct quantized structure align with biological structure</a:t>
             </a:r>
-            <a:endParaRPr lang="" altLang="en-US"/>
           </a:p>
           <a:p>
             <a:endParaRPr lang="" altLang="en-US"/>
@@ -4586,6 +4558,8 @@
       </a:bgFillStyleLst>
     </a:fmtScheme>
   </a:themeElements>
+  <a:objectDefaults/>
+  <a:extraClrSchemeLst/>
   <a:extLst>
     <a:ext uri="{05A4C25C-085E-4340-85A3-A5531E510DB2}">
       <thm15:themeFamily xmlns:thm15="http://schemas.microsoft.com/office/thememl/2012/main" name="Office Theme" id="{62F939B6-93AF-4DB8-9C6B-D6C7DFDC589F}" vid="{4A3C46E8-61CC-4603-A589-7422A47A8E4A}"/>
